--- a/3_Automatic_Fraud_Detection/presentation/fraud_detection_presentation.pptx
+++ b/3_Automatic_Fraud_Detection/presentation/fraud_detection_presentation.pptx
@@ -3555,7 +3555,7 @@
                 <a:ea typeface="Calibri" pitchFamily="34" charset="-122"/>
                 <a:cs typeface="Calibri" pitchFamily="34" charset="-120"/>
               </a:rPr>
-              <a:t>Nom, adresse, carte retirés. Carte anonymisée. Conformité RGPD.</a:t>
+              <a:t>Nom, adresse, carte retirés. Carte masquée. Conformité RGPD.</a:t>
             </a:r>
             <a:endParaRPr lang="en-US" sz="1300" dirty="0"/>
           </a:p>
